--- a/output_pptx/Praise.pptx
+++ b/output_pptx/Praise.pptx
@@ -3118,8 +3118,8 @@
         </p:nvSpPr>
         <p:spPr>
           <a:xfrm>
-            <a:off x="594360" y="2258568"/>
-            <a:ext cx="11002975" cy="685800"/>
+            <a:off x="640080" y="2052828"/>
+            <a:ext cx="10911535" cy="731520"/>
           </a:xfrm>
           <a:prstGeom prst="rect">
             <a:avLst/>
@@ -3134,7 +3134,7 @@
           <a:p>
             <a:pPr algn="ctr"/>
             <a:r>
-              <a:rPr sz="4400" b="1" i="0">
+              <a:rPr sz="4800" b="1" i="0">
                 <a:solidFill>
                   <a:srgbClr val="FFFFFF"/>
                 </a:solidFill>
@@ -3153,8 +3153,8 @@
         </p:nvSpPr>
         <p:spPr>
           <a:xfrm>
-            <a:off x="594360" y="2980944"/>
-            <a:ext cx="11002975" cy="347472"/>
+            <a:off x="640080" y="2985516"/>
+            <a:ext cx="10911535" cy="731520"/>
           </a:xfrm>
           <a:prstGeom prst="rect">
             <a:avLst/>
@@ -3169,83 +3169,13 @@
           <a:p>
             <a:pPr algn="ctr"/>
             <a:r>
-              <a:rPr sz="2200" b="0" i="1">
-                <a:solidFill>
-                  <a:srgbClr val="8C8C8C"/>
-                </a:solidFill>
-                <a:latin typeface="Arial"/>
-              </a:rPr>
-              <a:t/>
-            </a:r>
-          </a:p>
-        </p:txBody>
-      </p:sp>
-      <p:sp>
-        <p:nvSpPr>
-          <p:cNvPr id="4" name="TextBox 3"/>
-          <p:cNvSpPr txBox="1"/>
-          <p:nvPr/>
-        </p:nvSpPr>
-        <p:spPr>
-          <a:xfrm>
-            <a:off x="594360" y="3529584"/>
-            <a:ext cx="11002975" cy="685800"/>
-          </a:xfrm>
-          <a:prstGeom prst="rect">
-            <a:avLst/>
-          </a:prstGeom>
-          <a:noFill/>
-        </p:spPr>
-        <p:txBody>
-          <a:bodyPr wrap="square">
-            <a:spAutoFit/>
-          </a:bodyPr>
-          <a:lstStyle/>
-          <a:p>
-            <a:pPr algn="ctr"/>
-            <a:r>
-              <a:rPr sz="4400" b="1" i="0">
+              <a:rPr sz="4800" b="1" i="0">
                 <a:solidFill>
                   <a:srgbClr val="FFFFFF"/>
                 </a:solidFill>
                 <a:latin typeface="Arial"/>
               </a:rPr>
               <a:t>Louvarei porque Você reina</a:t>
-            </a:r>
-          </a:p>
-        </p:txBody>
-      </p:sp>
-      <p:sp>
-        <p:nvSpPr>
-          <p:cNvPr id="5" name="TextBox 4"/>
-          <p:cNvSpPr txBox="1"/>
-          <p:nvPr/>
-        </p:nvSpPr>
-        <p:spPr>
-          <a:xfrm>
-            <a:off x="594360" y="4251960"/>
-            <a:ext cx="11002975" cy="347472"/>
-          </a:xfrm>
-          <a:prstGeom prst="rect">
-            <a:avLst/>
-          </a:prstGeom>
-          <a:noFill/>
-        </p:spPr>
-        <p:txBody>
-          <a:bodyPr wrap="square">
-            <a:spAutoFit/>
-          </a:bodyPr>
-          <a:lstStyle/>
-          <a:p>
-            <a:pPr algn="ctr"/>
-            <a:r>
-              <a:rPr sz="2200" b="0" i="1">
-                <a:solidFill>
-                  <a:srgbClr val="8C8C8C"/>
-                </a:solidFill>
-                <a:latin typeface="Arial"/>
-              </a:rPr>
-              <a:t/>
             </a:r>
           </a:p>
         </p:txBody>
@@ -3284,8 +3214,8 @@
         </p:nvSpPr>
         <p:spPr>
           <a:xfrm>
-            <a:off x="594360" y="1837944"/>
-            <a:ext cx="11002975" cy="685800"/>
+            <a:off x="640080" y="1650492"/>
+            <a:ext cx="10911535" cy="731520"/>
           </a:xfrm>
           <a:prstGeom prst="rect">
             <a:avLst/>
@@ -3300,7 +3230,7 @@
           <a:p>
             <a:pPr algn="ctr"/>
             <a:r>
-              <a:rPr sz="4400" b="1" i="0">
+              <a:rPr sz="4800" b="1" i="0">
                 <a:solidFill>
                   <a:srgbClr val="FFFFFF"/>
                 </a:solidFill>
@@ -3319,8 +3249,8 @@
         </p:nvSpPr>
         <p:spPr>
           <a:xfrm>
-            <a:off x="594360" y="2560320"/>
-            <a:ext cx="11002975" cy="384048"/>
+            <a:off x="640080" y="2418588"/>
+            <a:ext cx="10911535" cy="365760"/>
           </a:xfrm>
           <a:prstGeom prst="rect">
             <a:avLst/>
@@ -3337,7 +3267,7 @@
             <a:r>
               <a:rPr sz="2400" b="0" i="1">
                 <a:solidFill>
-                  <a:srgbClr val="B4B4B4"/>
+                  <a:srgbClr val="AAAAAA"/>
                 </a:solidFill>
                 <a:latin typeface="Arial"/>
               </a:rPr>
@@ -3354,8 +3284,8 @@
         </p:nvSpPr>
         <p:spPr>
           <a:xfrm>
-            <a:off x="594360" y="2980944"/>
-            <a:ext cx="11002975" cy="347472"/>
+            <a:off x="640080" y="2985516"/>
+            <a:ext cx="10911535" cy="731520"/>
           </a:xfrm>
           <a:prstGeom prst="rect">
             <a:avLst/>
@@ -3370,13 +3300,13 @@
           <a:p>
             <a:pPr algn="ctr"/>
             <a:r>
-              <a:rPr sz="2000" b="0" i="1">
-                <a:solidFill>
-                  <a:srgbClr val="8C8C8C"/>
+              <a:rPr sz="4800" b="1" i="0">
+                <a:solidFill>
+                  <a:srgbClr val="FFFFFF"/>
                 </a:solidFill>
                 <a:latin typeface="Arial"/>
               </a:rPr>
-              <a:t/>
+              <a:t>主を褒め歌う</a:t>
             </a:r>
           </a:p>
         </p:txBody>
@@ -3389,8 +3319,8 @@
         </p:nvSpPr>
         <p:spPr>
           <a:xfrm>
-            <a:off x="594360" y="3529584"/>
-            <a:ext cx="11002975" cy="685800"/>
+            <a:off x="640080" y="3753612"/>
+            <a:ext cx="10911535" cy="365760"/>
           </a:xfrm>
           <a:prstGeom prst="rect">
             <a:avLst/>
@@ -3405,13 +3335,13 @@
           <a:p>
             <a:pPr algn="ctr"/>
             <a:r>
-              <a:rPr sz="4400" b="1" i="0">
-                <a:solidFill>
-                  <a:srgbClr val="FFFFFF"/>
+              <a:rPr sz="2400" b="0" i="1">
+                <a:solidFill>
+                  <a:srgbClr val="AAAAAA"/>
                 </a:solidFill>
                 <a:latin typeface="Arial"/>
               </a:rPr>
-              <a:t>主を褒め歌う</a:t>
+              <a:t>shu wo home utau</a:t>
             </a:r>
           </a:p>
         </p:txBody>
@@ -3424,8 +3354,8 @@
         </p:nvSpPr>
         <p:spPr>
           <a:xfrm>
-            <a:off x="594360" y="4251960"/>
-            <a:ext cx="11002975" cy="384048"/>
+            <a:off x="640080" y="4530852"/>
+            <a:ext cx="10911535" cy="310896"/>
           </a:xfrm>
           <a:prstGeom prst="rect">
             <a:avLst/>
@@ -3440,13 +3370,13 @@
           <a:p>
             <a:pPr algn="ctr"/>
             <a:r>
-              <a:rPr sz="2400" b="0" i="1">
-                <a:solidFill>
-                  <a:srgbClr val="B4B4B4"/>
+              <a:rPr sz="2000" b="0" i="1">
+                <a:solidFill>
+                  <a:srgbClr val="828282"/>
                 </a:solidFill>
                 <a:latin typeface="Arial"/>
               </a:rPr>
-              <a:t>shu wo home utau</a:t>
+              <a:t>Tudo que tem fôlego</a:t>
             </a:r>
           </a:p>
         </p:txBody>
@@ -3459,8 +3389,8 @@
         </p:nvSpPr>
         <p:spPr>
           <a:xfrm>
-            <a:off x="594360" y="4672584"/>
-            <a:ext cx="11002975" cy="347472"/>
+            <a:off x="640080" y="4896612"/>
+            <a:ext cx="10911535" cy="310896"/>
           </a:xfrm>
           <a:prstGeom prst="rect">
             <a:avLst/>
@@ -3477,11 +3407,11 @@
             <a:r>
               <a:rPr sz="2000" b="0" i="1">
                 <a:solidFill>
-                  <a:srgbClr val="8C8C8C"/>
+                  <a:srgbClr val="828282"/>
                 </a:solidFill>
                 <a:latin typeface="Arial"/>
               </a:rPr>
-              <a:t/>
+              <a:t>Louve ao Senhor, louve ao Senhor</a:t>
             </a:r>
           </a:p>
         </p:txBody>
@@ -3520,8 +3450,8 @@
         </p:nvSpPr>
         <p:spPr>
           <a:xfrm>
-            <a:off x="594360" y="2258568"/>
-            <a:ext cx="11002975" cy="685800"/>
+            <a:off x="640080" y="2052828"/>
+            <a:ext cx="10911535" cy="731520"/>
           </a:xfrm>
           <a:prstGeom prst="rect">
             <a:avLst/>
@@ -3536,7 +3466,7 @@
           <a:p>
             <a:pPr algn="ctr"/>
             <a:r>
-              <a:rPr sz="4400" b="1" i="0">
+              <a:rPr sz="4800" b="1" i="0">
                 <a:solidFill>
                   <a:srgbClr val="FFFFFF"/>
                 </a:solidFill>
@@ -3555,8 +3485,8 @@
         </p:nvSpPr>
         <p:spPr>
           <a:xfrm>
-            <a:off x="594360" y="2980944"/>
-            <a:ext cx="11002975" cy="347472"/>
+            <a:off x="640080" y="2985516"/>
+            <a:ext cx="10911535" cy="731520"/>
           </a:xfrm>
           <a:prstGeom prst="rect">
             <a:avLst/>
@@ -3571,13 +3501,13 @@
           <a:p>
             <a:pPr algn="ctr"/>
             <a:r>
-              <a:rPr sz="2200" b="0" i="1">
-                <a:solidFill>
-                  <a:srgbClr val="8C8C8C"/>
+              <a:rPr sz="4800" b="1" i="0">
+                <a:solidFill>
+                  <a:srgbClr val="FFFFFF"/>
                 </a:solidFill>
                 <a:latin typeface="Arial"/>
               </a:rPr>
-              <a:t/>
+              <a:t>Louve ao Senhor</a:t>
             </a:r>
           </a:p>
         </p:txBody>
@@ -3590,8 +3520,8 @@
         </p:nvSpPr>
         <p:spPr>
           <a:xfrm>
-            <a:off x="594360" y="3529584"/>
-            <a:ext cx="11002975" cy="685800"/>
+            <a:off x="640080" y="4128516"/>
+            <a:ext cx="10911535" cy="310896"/>
           </a:xfrm>
           <a:prstGeom prst="rect">
             <a:avLst/>
@@ -3606,13 +3536,13 @@
           <a:p>
             <a:pPr algn="ctr"/>
             <a:r>
-              <a:rPr sz="4400" b="1" i="0">
-                <a:solidFill>
-                  <a:srgbClr val="FFFFFF"/>
+              <a:rPr sz="2000" b="0" i="0">
+                <a:solidFill>
+                  <a:srgbClr val="828282"/>
                 </a:solidFill>
                 <a:latin typeface="Arial"/>
               </a:rPr>
-              <a:t>Louve ao Senhor</a:t>
+              <a:t>こえーあげ たたえよ 魂よ</a:t>
             </a:r>
           </a:p>
         </p:txBody>
@@ -3625,8 +3555,8 @@
         </p:nvSpPr>
         <p:spPr>
           <a:xfrm>
-            <a:off x="594360" y="4251960"/>
-            <a:ext cx="11002975" cy="347472"/>
+            <a:off x="640080" y="4494276"/>
+            <a:ext cx="10911535" cy="310896"/>
           </a:xfrm>
           <a:prstGeom prst="rect">
             <a:avLst/>
@@ -3641,13 +3571,13 @@
           <a:p>
             <a:pPr algn="ctr"/>
             <a:r>
-              <a:rPr sz="2200" b="0" i="1">
-                <a:solidFill>
-                  <a:srgbClr val="8C8C8C"/>
+              <a:rPr sz="2000" b="0" i="0">
+                <a:solidFill>
+                  <a:srgbClr val="828282"/>
                 </a:solidFill>
                 <a:latin typeface="Arial"/>
               </a:rPr>
-              <a:t/>
+              <a:t>こえーあげ たたえよ 魂よ</a:t>
             </a:r>
           </a:p>
         </p:txBody>
@@ -3686,8 +3616,8 @@
         </p:nvSpPr>
         <p:spPr>
           <a:xfrm>
-            <a:off x="594360" y="2258568"/>
-            <a:ext cx="11002975" cy="685800"/>
+            <a:off x="640080" y="2052828"/>
+            <a:ext cx="10911535" cy="731520"/>
           </a:xfrm>
           <a:prstGeom prst="rect">
             <a:avLst/>
@@ -3702,7 +3632,7 @@
           <a:p>
             <a:pPr algn="ctr"/>
             <a:r>
-              <a:rPr sz="4400" b="1" i="0">
+              <a:rPr sz="4800" b="1" i="0">
                 <a:solidFill>
                   <a:srgbClr val="FFFFFF"/>
                 </a:solidFill>
@@ -3721,8 +3651,8 @@
         </p:nvSpPr>
         <p:spPr>
           <a:xfrm>
-            <a:off x="594360" y="2980944"/>
-            <a:ext cx="11002975" cy="347472"/>
+            <a:off x="640080" y="2985516"/>
+            <a:ext cx="10911535" cy="731520"/>
           </a:xfrm>
           <a:prstGeom prst="rect">
             <a:avLst/>
@@ -3737,83 +3667,13 @@
           <a:p>
             <a:pPr algn="ctr"/>
             <a:r>
-              <a:rPr sz="2200" b="0" i="1">
-                <a:solidFill>
-                  <a:srgbClr val="8C8C8C"/>
-                </a:solidFill>
-                <a:latin typeface="Arial"/>
-              </a:rPr>
-              <a:t/>
-            </a:r>
-          </a:p>
-        </p:txBody>
-      </p:sp>
-      <p:sp>
-        <p:nvSpPr>
-          <p:cNvPr id="4" name="TextBox 3"/>
-          <p:cNvSpPr txBox="1"/>
-          <p:nvPr/>
-        </p:nvSpPr>
-        <p:spPr>
-          <a:xfrm>
-            <a:off x="594360" y="3529584"/>
-            <a:ext cx="11002975" cy="685800"/>
-          </a:xfrm>
-          <a:prstGeom prst="rect">
-            <a:avLst/>
-          </a:prstGeom>
-          <a:noFill/>
-        </p:spPr>
-        <p:txBody>
-          <a:bodyPr wrap="square">
-            <a:spAutoFit/>
-          </a:bodyPr>
-          <a:lstStyle/>
-          <a:p>
-            <a:pPr algn="ctr"/>
-            <a:r>
-              <a:rPr sz="4400" b="1" i="0">
+              <a:rPr sz="4800" b="1" i="0">
                 <a:solidFill>
                   <a:srgbClr val="FFFFFF"/>
                 </a:solidFill>
                 <a:latin typeface="Arial"/>
               </a:rPr>
               <a:t>Louve ao Senhor</a:t>
-            </a:r>
-          </a:p>
-        </p:txBody>
-      </p:sp>
-      <p:sp>
-        <p:nvSpPr>
-          <p:cNvPr id="5" name="TextBox 4"/>
-          <p:cNvSpPr txBox="1"/>
-          <p:nvPr/>
-        </p:nvSpPr>
-        <p:spPr>
-          <a:xfrm>
-            <a:off x="594360" y="4251960"/>
-            <a:ext cx="11002975" cy="347472"/>
-          </a:xfrm>
-          <a:prstGeom prst="rect">
-            <a:avLst/>
-          </a:prstGeom>
-          <a:noFill/>
-        </p:spPr>
-        <p:txBody>
-          <a:bodyPr wrap="square">
-            <a:spAutoFit/>
-          </a:bodyPr>
-          <a:lstStyle/>
-          <a:p>
-            <a:pPr algn="ctr"/>
-            <a:r>
-              <a:rPr sz="2200" b="0" i="1">
-                <a:solidFill>
-                  <a:srgbClr val="8C8C8C"/>
-                </a:solidFill>
-                <a:latin typeface="Arial"/>
-              </a:rPr>
-              <a:t/>
             </a:r>
           </a:p>
         </p:txBody>
@@ -3852,8 +3712,8 @@
         </p:nvSpPr>
         <p:spPr>
           <a:xfrm>
-            <a:off x="594360" y="2258568"/>
-            <a:ext cx="11002975" cy="685800"/>
+            <a:off x="640080" y="2052828"/>
+            <a:ext cx="10911535" cy="731520"/>
           </a:xfrm>
           <a:prstGeom prst="rect">
             <a:avLst/>
@@ -3868,7 +3728,7 @@
           <a:p>
             <a:pPr algn="ctr"/>
             <a:r>
-              <a:rPr sz="4400" b="1" i="0">
+              <a:rPr sz="4800" b="1" i="0">
                 <a:solidFill>
                   <a:srgbClr val="FFFFFF"/>
                 </a:solidFill>
@@ -3887,8 +3747,8 @@
         </p:nvSpPr>
         <p:spPr>
           <a:xfrm>
-            <a:off x="594360" y="2980944"/>
-            <a:ext cx="11002975" cy="347472"/>
+            <a:off x="640080" y="2985516"/>
+            <a:ext cx="10911535" cy="731520"/>
           </a:xfrm>
           <a:prstGeom prst="rect">
             <a:avLst/>
@@ -3903,83 +3763,13 @@
           <a:p>
             <a:pPr algn="ctr"/>
             <a:r>
-              <a:rPr sz="2200" b="0" i="1">
-                <a:solidFill>
-                  <a:srgbClr val="8C8C8C"/>
-                </a:solidFill>
-                <a:latin typeface="Arial"/>
-              </a:rPr>
-              <a:t/>
-            </a:r>
-          </a:p>
-        </p:txBody>
-      </p:sp>
-      <p:sp>
-        <p:nvSpPr>
-          <p:cNvPr id="4" name="TextBox 3"/>
-          <p:cNvSpPr txBox="1"/>
-          <p:nvPr/>
-        </p:nvSpPr>
-        <p:spPr>
-          <a:xfrm>
-            <a:off x="594360" y="3529584"/>
-            <a:ext cx="11002975" cy="685800"/>
-          </a:xfrm>
-          <a:prstGeom prst="rect">
-            <a:avLst/>
-          </a:prstGeom>
-          <a:noFill/>
-        </p:spPr>
-        <p:txBody>
-          <a:bodyPr wrap="square">
-            <a:spAutoFit/>
-          </a:bodyPr>
-          <a:lstStyle/>
-          <a:p>
-            <a:pPr algn="ctr"/>
-            <a:r>
-              <a:rPr sz="4400" b="1" i="0">
+              <a:rPr sz="4800" b="1" i="0">
                 <a:solidFill>
                   <a:srgbClr val="FFFFFF"/>
                 </a:solidFill>
                 <a:latin typeface="Arial"/>
               </a:rPr>
               <a:t>Louve ao Senhor</a:t>
-            </a:r>
-          </a:p>
-        </p:txBody>
-      </p:sp>
-      <p:sp>
-        <p:nvSpPr>
-          <p:cNvPr id="5" name="TextBox 4"/>
-          <p:cNvSpPr txBox="1"/>
-          <p:nvPr/>
-        </p:nvSpPr>
-        <p:spPr>
-          <a:xfrm>
-            <a:off x="594360" y="4251960"/>
-            <a:ext cx="11002975" cy="347472"/>
-          </a:xfrm>
-          <a:prstGeom prst="rect">
-            <a:avLst/>
-          </a:prstGeom>
-          <a:noFill/>
-        </p:spPr>
-        <p:txBody>
-          <a:bodyPr wrap="square">
-            <a:spAutoFit/>
-          </a:bodyPr>
-          <a:lstStyle/>
-          <a:p>
-            <a:pPr algn="ctr"/>
-            <a:r>
-              <a:rPr sz="2200" b="0" i="1">
-                <a:solidFill>
-                  <a:srgbClr val="8C8C8C"/>
-                </a:solidFill>
-                <a:latin typeface="Arial"/>
-              </a:rPr>
-              <a:t/>
             </a:r>
           </a:p>
         </p:txBody>
@@ -4018,8 +3808,8 @@
         </p:nvSpPr>
         <p:spPr>
           <a:xfrm>
-            <a:off x="594360" y="1837944"/>
-            <a:ext cx="11002975" cy="685800"/>
+            <a:off x="640080" y="1650492"/>
+            <a:ext cx="10911535" cy="731520"/>
           </a:xfrm>
           <a:prstGeom prst="rect">
             <a:avLst/>
@@ -4034,7 +3824,7 @@
           <a:p>
             <a:pPr algn="ctr"/>
             <a:r>
-              <a:rPr sz="4400" b="1" i="0">
+              <a:rPr sz="4800" b="1" i="0">
                 <a:solidFill>
                   <a:srgbClr val="FFFFFF"/>
                 </a:solidFill>
@@ -4053,8 +3843,8 @@
         </p:nvSpPr>
         <p:spPr>
           <a:xfrm>
-            <a:off x="594360" y="2560320"/>
-            <a:ext cx="11002975" cy="384048"/>
+            <a:off x="640080" y="2418588"/>
+            <a:ext cx="10911535" cy="365760"/>
           </a:xfrm>
           <a:prstGeom prst="rect">
             <a:avLst/>
@@ -4071,7 +3861,7 @@
             <a:r>
               <a:rPr sz="2400" b="0" i="1">
                 <a:solidFill>
-                  <a:srgbClr val="B4B4B4"/>
+                  <a:srgbClr val="AAAAAA"/>
                 </a:solidFill>
                 <a:latin typeface="Arial"/>
               </a:rPr>
@@ -4088,8 +3878,8 @@
         </p:nvSpPr>
         <p:spPr>
           <a:xfrm>
-            <a:off x="594360" y="2980944"/>
-            <a:ext cx="11002975" cy="347472"/>
+            <a:off x="640080" y="2985516"/>
+            <a:ext cx="10911535" cy="731520"/>
           </a:xfrm>
           <a:prstGeom prst="rect">
             <a:avLst/>
@@ -4104,13 +3894,13 @@
           <a:p>
             <a:pPr algn="ctr"/>
             <a:r>
-              <a:rPr sz="2000" b="0" i="1">
-                <a:solidFill>
-                  <a:srgbClr val="8C8C8C"/>
+              <a:rPr sz="4800" b="1" i="0">
+                <a:solidFill>
+                  <a:srgbClr val="FFFFFF"/>
                 </a:solidFill>
                 <a:latin typeface="Arial"/>
               </a:rPr>
-              <a:t/>
+              <a:t>よみがえり    勝利した主</a:t>
             </a:r>
           </a:p>
         </p:txBody>
@@ -4123,8 +3913,8 @@
         </p:nvSpPr>
         <p:spPr>
           <a:xfrm>
-            <a:off x="594360" y="3529584"/>
-            <a:ext cx="11002975" cy="685800"/>
+            <a:off x="640080" y="3753612"/>
+            <a:ext cx="10911535" cy="365760"/>
           </a:xfrm>
           <a:prstGeom prst="rect">
             <a:avLst/>
@@ -4139,83 +3929,13 @@
           <a:p>
             <a:pPr algn="ctr"/>
             <a:r>
-              <a:rPr sz="4400" b="1" i="0">
-                <a:solidFill>
-                  <a:srgbClr val="FFFFFF"/>
-                </a:solidFill>
-                <a:latin typeface="Arial"/>
-              </a:rPr>
-              <a:t>よみがえり    勝利した主</a:t>
-            </a:r>
-          </a:p>
-        </p:txBody>
-      </p:sp>
-      <p:sp>
-        <p:nvSpPr>
-          <p:cNvPr id="6" name="TextBox 5"/>
-          <p:cNvSpPr txBox="1"/>
-          <p:nvPr/>
-        </p:nvSpPr>
-        <p:spPr>
-          <a:xfrm>
-            <a:off x="594360" y="4251960"/>
-            <a:ext cx="11002975" cy="384048"/>
-          </a:xfrm>
-          <a:prstGeom prst="rect">
-            <a:avLst/>
-          </a:prstGeom>
-          <a:noFill/>
-        </p:spPr>
-        <p:txBody>
-          <a:bodyPr wrap="square">
-            <a:spAutoFit/>
-          </a:bodyPr>
-          <a:lstStyle/>
-          <a:p>
-            <a:pPr algn="ctr"/>
-            <a:r>
               <a:rPr sz="2400" b="0" i="1">
                 <a:solidFill>
-                  <a:srgbClr val="B4B4B4"/>
+                  <a:srgbClr val="AAAAAA"/>
                 </a:solidFill>
                 <a:latin typeface="Arial"/>
               </a:rPr>
               <a:t>yomigaeri   shori Shita shu</a:t>
-            </a:r>
-          </a:p>
-        </p:txBody>
-      </p:sp>
-      <p:sp>
-        <p:nvSpPr>
-          <p:cNvPr id="7" name="TextBox 6"/>
-          <p:cNvSpPr txBox="1"/>
-          <p:nvPr/>
-        </p:nvSpPr>
-        <p:spPr>
-          <a:xfrm>
-            <a:off x="594360" y="4672584"/>
-            <a:ext cx="11002975" cy="347472"/>
-          </a:xfrm>
-          <a:prstGeom prst="rect">
-            <a:avLst/>
-          </a:prstGeom>
-          <a:noFill/>
-        </p:spPr>
-        <p:txBody>
-          <a:bodyPr wrap="square">
-            <a:spAutoFit/>
-          </a:bodyPr>
-          <a:lstStyle/>
-          <a:p>
-            <a:pPr algn="ctr"/>
-            <a:r>
-              <a:rPr sz="2000" b="0" i="1">
-                <a:solidFill>
-                  <a:srgbClr val="8C8C8C"/>
-                </a:solidFill>
-                <a:latin typeface="Arial"/>
-              </a:rPr>
-              <a:t/>
             </a:r>
           </a:p>
         </p:txBody>
@@ -4254,8 +3974,8 @@
         </p:nvSpPr>
         <p:spPr>
           <a:xfrm>
-            <a:off x="594360" y="1837944"/>
-            <a:ext cx="11002975" cy="685800"/>
+            <a:off x="640080" y="1650492"/>
+            <a:ext cx="10911535" cy="731520"/>
           </a:xfrm>
           <a:prstGeom prst="rect">
             <a:avLst/>
@@ -4270,7 +3990,7 @@
           <a:p>
             <a:pPr algn="ctr"/>
             <a:r>
-              <a:rPr sz="4400" b="1" i="0">
+              <a:rPr sz="4800" b="1" i="0">
                 <a:solidFill>
                   <a:srgbClr val="FFFFFF"/>
                 </a:solidFill>
@@ -4289,8 +4009,8 @@
         </p:nvSpPr>
         <p:spPr>
           <a:xfrm>
-            <a:off x="594360" y="2560320"/>
-            <a:ext cx="11002975" cy="384048"/>
+            <a:off x="640080" y="2418588"/>
+            <a:ext cx="10911535" cy="365760"/>
           </a:xfrm>
           <a:prstGeom prst="rect">
             <a:avLst/>
@@ -4307,7 +4027,7 @@
             <a:r>
               <a:rPr sz="2400" b="0" i="1">
                 <a:solidFill>
-                  <a:srgbClr val="B4B4B4"/>
+                  <a:srgbClr val="AAAAAA"/>
                 </a:solidFill>
                 <a:latin typeface="Arial"/>
               </a:rPr>
@@ -4324,8 +4044,8 @@
         </p:nvSpPr>
         <p:spPr>
           <a:xfrm>
-            <a:off x="594360" y="2980944"/>
-            <a:ext cx="11002975" cy="347472"/>
+            <a:off x="640080" y="2985516"/>
+            <a:ext cx="10911535" cy="731520"/>
           </a:xfrm>
           <a:prstGeom prst="rect">
             <a:avLst/>
@@ -4340,13 +4060,13 @@
           <a:p>
             <a:pPr algn="ctr"/>
             <a:r>
-              <a:rPr sz="2000" b="0" i="1">
-                <a:solidFill>
-                  <a:srgbClr val="8C8C8C"/>
+              <a:rPr sz="4800" b="1" i="0">
+                <a:solidFill>
+                  <a:srgbClr val="FFFFFF"/>
                 </a:solidFill>
                 <a:latin typeface="Arial"/>
               </a:rPr>
-              <a:t/>
+              <a:t>あなたに勝る     ものはない</a:t>
             </a:r>
           </a:p>
         </p:txBody>
@@ -4359,8 +4079,8 @@
         </p:nvSpPr>
         <p:spPr>
           <a:xfrm>
-            <a:off x="594360" y="3529584"/>
-            <a:ext cx="11002975" cy="685800"/>
+            <a:off x="640080" y="3753612"/>
+            <a:ext cx="10911535" cy="365760"/>
           </a:xfrm>
           <a:prstGeom prst="rect">
             <a:avLst/>
@@ -4375,83 +4095,13 @@
           <a:p>
             <a:pPr algn="ctr"/>
             <a:r>
-              <a:rPr sz="4400" b="1" i="0">
-                <a:solidFill>
-                  <a:srgbClr val="FFFFFF"/>
-                </a:solidFill>
-                <a:latin typeface="Arial"/>
-              </a:rPr>
-              <a:t>あなたに勝る     ものはない</a:t>
-            </a:r>
-          </a:p>
-        </p:txBody>
-      </p:sp>
-      <p:sp>
-        <p:nvSpPr>
-          <p:cNvPr id="6" name="TextBox 5"/>
-          <p:cNvSpPr txBox="1"/>
-          <p:nvPr/>
-        </p:nvSpPr>
-        <p:spPr>
-          <a:xfrm>
-            <a:off x="594360" y="4251960"/>
-            <a:ext cx="11002975" cy="384048"/>
-          </a:xfrm>
-          <a:prstGeom prst="rect">
-            <a:avLst/>
-          </a:prstGeom>
-          <a:noFill/>
-        </p:spPr>
-        <p:txBody>
-          <a:bodyPr wrap="square">
-            <a:spAutoFit/>
-          </a:bodyPr>
-          <a:lstStyle/>
-          <a:p>
-            <a:pPr algn="ctr"/>
-            <a:r>
               <a:rPr sz="2400" b="0" i="1">
                 <a:solidFill>
-                  <a:srgbClr val="B4B4B4"/>
+                  <a:srgbClr val="AAAAAA"/>
                 </a:solidFill>
                 <a:latin typeface="Arial"/>
               </a:rPr>
               <a:t>anata ni masaru mono wa nai</a:t>
-            </a:r>
-          </a:p>
-        </p:txBody>
-      </p:sp>
-      <p:sp>
-        <p:nvSpPr>
-          <p:cNvPr id="7" name="TextBox 6"/>
-          <p:cNvSpPr txBox="1"/>
-          <p:nvPr/>
-        </p:nvSpPr>
-        <p:spPr>
-          <a:xfrm>
-            <a:off x="594360" y="4672584"/>
-            <a:ext cx="11002975" cy="347472"/>
-          </a:xfrm>
-          <a:prstGeom prst="rect">
-            <a:avLst/>
-          </a:prstGeom>
-          <a:noFill/>
-        </p:spPr>
-        <p:txBody>
-          <a:bodyPr wrap="square">
-            <a:spAutoFit/>
-          </a:bodyPr>
-          <a:lstStyle/>
-          <a:p>
-            <a:pPr algn="ctr"/>
-            <a:r>
-              <a:rPr sz="2000" b="0" i="1">
-                <a:solidFill>
-                  <a:srgbClr val="8C8C8C"/>
-                </a:solidFill>
-                <a:latin typeface="Arial"/>
-              </a:rPr>
-              <a:t/>
             </a:r>
           </a:p>
         </p:txBody>
@@ -4490,8 +4140,8 @@
         </p:nvSpPr>
         <p:spPr>
           <a:xfrm>
-            <a:off x="594360" y="2258568"/>
-            <a:ext cx="11002975" cy="685800"/>
+            <a:off x="640080" y="2052828"/>
+            <a:ext cx="10911535" cy="731520"/>
           </a:xfrm>
           <a:prstGeom prst="rect">
             <a:avLst/>
@@ -4506,7 +4156,7 @@
           <a:p>
             <a:pPr algn="ctr"/>
             <a:r>
-              <a:rPr sz="4400" b="1" i="0">
+              <a:rPr sz="4800" b="1" i="0">
                 <a:solidFill>
                   <a:srgbClr val="FFFFFF"/>
                 </a:solidFill>
@@ -4525,8 +4175,8 @@
         </p:nvSpPr>
         <p:spPr>
           <a:xfrm>
-            <a:off x="594360" y="2980944"/>
-            <a:ext cx="11002975" cy="347472"/>
+            <a:off x="640080" y="2985516"/>
+            <a:ext cx="10911535" cy="731520"/>
           </a:xfrm>
           <a:prstGeom prst="rect">
             <a:avLst/>
@@ -4541,83 +4191,13 @@
           <a:p>
             <a:pPr algn="ctr"/>
             <a:r>
-              <a:rPr sz="2200" b="0" i="1">
-                <a:solidFill>
-                  <a:srgbClr val="8C8C8C"/>
-                </a:solidFill>
-                <a:latin typeface="Arial"/>
-              </a:rPr>
-              <a:t/>
-            </a:r>
-          </a:p>
-        </p:txBody>
-      </p:sp>
-      <p:sp>
-        <p:nvSpPr>
-          <p:cNvPr id="4" name="TextBox 3"/>
-          <p:cNvSpPr txBox="1"/>
-          <p:nvPr/>
-        </p:nvSpPr>
-        <p:spPr>
-          <a:xfrm>
-            <a:off x="594360" y="3529584"/>
-            <a:ext cx="11002975" cy="685800"/>
-          </a:xfrm>
-          <a:prstGeom prst="rect">
-            <a:avLst/>
-          </a:prstGeom>
-          <a:noFill/>
-        </p:spPr>
-        <p:txBody>
-          <a:bodyPr wrap="square">
-            <a:spAutoFit/>
-          </a:bodyPr>
-          <a:lstStyle/>
-          <a:p>
-            <a:pPr algn="ctr"/>
-            <a:r>
-              <a:rPr sz="4400" b="1" i="0">
+              <a:rPr sz="4800" b="1" i="0">
                 <a:solidFill>
                   <a:srgbClr val="FFFFFF"/>
                 </a:solidFill>
                 <a:latin typeface="Arial"/>
               </a:rPr>
               <a:t>Louve ao Senhor, louve ao Senhor</a:t>
-            </a:r>
-          </a:p>
-        </p:txBody>
-      </p:sp>
-      <p:sp>
-        <p:nvSpPr>
-          <p:cNvPr id="5" name="TextBox 4"/>
-          <p:cNvSpPr txBox="1"/>
-          <p:nvPr/>
-        </p:nvSpPr>
-        <p:spPr>
-          <a:xfrm>
-            <a:off x="594360" y="4251960"/>
-            <a:ext cx="11002975" cy="347472"/>
-          </a:xfrm>
-          <a:prstGeom prst="rect">
-            <a:avLst/>
-          </a:prstGeom>
-          <a:noFill/>
-        </p:spPr>
-        <p:txBody>
-          <a:bodyPr wrap="square">
-            <a:spAutoFit/>
-          </a:bodyPr>
-          <a:lstStyle/>
-          <a:p>
-            <a:pPr algn="ctr"/>
-            <a:r>
-              <a:rPr sz="2200" b="0" i="1">
-                <a:solidFill>
-                  <a:srgbClr val="8C8C8C"/>
-                </a:solidFill>
-                <a:latin typeface="Arial"/>
-              </a:rPr>
-              <a:t/>
             </a:r>
           </a:p>
         </p:txBody>
@@ -4656,8 +4236,8 @@
         </p:nvSpPr>
         <p:spPr>
           <a:xfrm>
-            <a:off x="594360" y="1837944"/>
-            <a:ext cx="11002975" cy="685800"/>
+            <a:off x="640080" y="1650492"/>
+            <a:ext cx="10911535" cy="731520"/>
           </a:xfrm>
           <a:prstGeom prst="rect">
             <a:avLst/>
@@ -4672,7 +4252,7 @@
           <a:p>
             <a:pPr algn="ctr"/>
             <a:r>
-              <a:rPr sz="4400" b="1" i="0">
+              <a:rPr sz="4800" b="1" i="0">
                 <a:solidFill>
                   <a:srgbClr val="FFFFFF"/>
                 </a:solidFill>
@@ -4691,8 +4271,8 @@
         </p:nvSpPr>
         <p:spPr>
           <a:xfrm>
-            <a:off x="594360" y="2560320"/>
-            <a:ext cx="11002975" cy="384048"/>
+            <a:off x="640080" y="2418588"/>
+            <a:ext cx="10911535" cy="365760"/>
           </a:xfrm>
           <a:prstGeom prst="rect">
             <a:avLst/>
@@ -4709,7 +4289,7 @@
             <a:r>
               <a:rPr sz="2400" b="0" i="1">
                 <a:solidFill>
-                  <a:srgbClr val="B4B4B4"/>
+                  <a:srgbClr val="AAAAAA"/>
                 </a:solidFill>
                 <a:latin typeface="Arial"/>
               </a:rPr>
@@ -4726,8 +4306,8 @@
         </p:nvSpPr>
         <p:spPr>
           <a:xfrm>
-            <a:off x="594360" y="2980944"/>
-            <a:ext cx="11002975" cy="347472"/>
+            <a:off x="640080" y="2985516"/>
+            <a:ext cx="10911535" cy="731520"/>
           </a:xfrm>
           <a:prstGeom prst="rect">
             <a:avLst/>
@@ -4742,13 +4322,13 @@
           <a:p>
             <a:pPr algn="ctr"/>
             <a:r>
-              <a:rPr sz="2000" b="0" i="1">
-                <a:solidFill>
-                  <a:srgbClr val="8C8C8C"/>
+              <a:rPr sz="4800" b="1" i="0">
+                <a:solidFill>
+                  <a:srgbClr val="FFFFFF"/>
                 </a:solidFill>
                 <a:latin typeface="Arial"/>
               </a:rPr>
-              <a:t/>
+              <a:t>この賛美は</a:t>
             </a:r>
           </a:p>
         </p:txBody>
@@ -4761,8 +4341,8 @@
         </p:nvSpPr>
         <p:spPr>
           <a:xfrm>
-            <a:off x="594360" y="3529584"/>
-            <a:ext cx="11002975" cy="685800"/>
+            <a:off x="640080" y="3753612"/>
+            <a:ext cx="10911535" cy="365760"/>
           </a:xfrm>
           <a:prstGeom prst="rect">
             <a:avLst/>
@@ -4777,13 +4357,13 @@
           <a:p>
             <a:pPr algn="ctr"/>
             <a:r>
-              <a:rPr sz="4400" b="1" i="0">
-                <a:solidFill>
-                  <a:srgbClr val="FFFFFF"/>
+              <a:rPr sz="2400" b="0" i="1">
+                <a:solidFill>
+                  <a:srgbClr val="AAAAAA"/>
                 </a:solidFill>
                 <a:latin typeface="Arial"/>
               </a:rPr>
-              <a:t>この賛美は</a:t>
+              <a:t>kono sambi wa</a:t>
             </a:r>
           </a:p>
         </p:txBody>
@@ -4796,8 +4376,8 @@
         </p:nvSpPr>
         <p:spPr>
           <a:xfrm>
-            <a:off x="594360" y="4251960"/>
-            <a:ext cx="11002975" cy="384048"/>
+            <a:off x="640080" y="4530852"/>
+            <a:ext cx="10911535" cy="310896"/>
           </a:xfrm>
           <a:prstGeom prst="rect">
             <a:avLst/>
@@ -4812,13 +4392,13 @@
           <a:p>
             <a:pPr algn="ctr"/>
             <a:r>
-              <a:rPr sz="2400" b="0" i="1">
-                <a:solidFill>
-                  <a:srgbClr val="B4B4B4"/>
+              <a:rPr sz="2000" b="0" i="1">
+                <a:solidFill>
+                  <a:srgbClr val="828282"/>
                 </a:solidFill>
                 <a:latin typeface="Arial"/>
               </a:rPr>
-              <a:t>kono sambi wa</a:t>
+              <a:t>Louvarei porque Você é soberano</a:t>
             </a:r>
           </a:p>
         </p:txBody>
@@ -4831,8 +4411,8 @@
         </p:nvSpPr>
         <p:spPr>
           <a:xfrm>
-            <a:off x="594360" y="4672584"/>
-            <a:ext cx="11002975" cy="347472"/>
+            <a:off x="640080" y="4896612"/>
+            <a:ext cx="10911535" cy="310896"/>
           </a:xfrm>
           <a:prstGeom prst="rect">
             <a:avLst/>
@@ -4849,11 +4429,11 @@
             <a:r>
               <a:rPr sz="2000" b="0" i="1">
                 <a:solidFill>
-                  <a:srgbClr val="8C8C8C"/>
+                  <a:srgbClr val="828282"/>
                 </a:solidFill>
                 <a:latin typeface="Arial"/>
               </a:rPr>
-              <a:t/>
+              <a:t>Louvarei porque Você reina</a:t>
             </a:r>
           </a:p>
         </p:txBody>
@@ -4892,8 +4472,8 @@
         </p:nvSpPr>
         <p:spPr>
           <a:xfrm>
-            <a:off x="594360" y="1837944"/>
-            <a:ext cx="11002975" cy="685800"/>
+            <a:off x="640080" y="1650492"/>
+            <a:ext cx="10911535" cy="731520"/>
           </a:xfrm>
           <a:prstGeom prst="rect">
             <a:avLst/>
@@ -4908,7 +4488,7 @@
           <a:p>
             <a:pPr algn="ctr"/>
             <a:r>
-              <a:rPr sz="4400" b="1" i="0">
+              <a:rPr sz="4800" b="1" i="0">
                 <a:solidFill>
                   <a:srgbClr val="FFFFFF"/>
                 </a:solidFill>
@@ -4927,8 +4507,8 @@
         </p:nvSpPr>
         <p:spPr>
           <a:xfrm>
-            <a:off x="594360" y="2560320"/>
-            <a:ext cx="11002975" cy="384048"/>
+            <a:off x="640080" y="2418588"/>
+            <a:ext cx="10911535" cy="365760"/>
           </a:xfrm>
           <a:prstGeom prst="rect">
             <a:avLst/>
@@ -4945,7 +4525,7 @@
             <a:r>
               <a:rPr sz="2400" b="0" i="1">
                 <a:solidFill>
-                  <a:srgbClr val="B4B4B4"/>
+                  <a:srgbClr val="AAAAAA"/>
                 </a:solidFill>
                 <a:latin typeface="Arial"/>
               </a:rPr>
@@ -4962,8 +4542,8 @@
         </p:nvSpPr>
         <p:spPr>
           <a:xfrm>
-            <a:off x="594360" y="2980944"/>
-            <a:ext cx="11002975" cy="347472"/>
+            <a:off x="640080" y="2985516"/>
+            <a:ext cx="10911535" cy="731520"/>
           </a:xfrm>
           <a:prstGeom prst="rect">
             <a:avLst/>
@@ -4978,13 +4558,13 @@
           <a:p>
             <a:pPr algn="ctr"/>
             <a:r>
-              <a:rPr sz="2000" b="0" i="1">
-                <a:solidFill>
-                  <a:srgbClr val="8C8C8C"/>
+              <a:rPr sz="4800" b="1" i="0">
+                <a:solidFill>
+                  <a:srgbClr val="FFFFFF"/>
                 </a:solidFill>
                 <a:latin typeface="Arial"/>
               </a:rPr>
-              <a:t/>
+              <a:t>飲み込んでゆく</a:t>
             </a:r>
           </a:p>
         </p:txBody>
@@ -4997,8 +4577,8 @@
         </p:nvSpPr>
         <p:spPr>
           <a:xfrm>
-            <a:off x="594360" y="3529584"/>
-            <a:ext cx="11002975" cy="685800"/>
+            <a:off x="640080" y="3753612"/>
+            <a:ext cx="10911535" cy="365760"/>
           </a:xfrm>
           <a:prstGeom prst="rect">
             <a:avLst/>
@@ -5013,13 +4593,13 @@
           <a:p>
             <a:pPr algn="ctr"/>
             <a:r>
-              <a:rPr sz="4400" b="1" i="0">
-                <a:solidFill>
-                  <a:srgbClr val="FFFFFF"/>
+              <a:rPr sz="2400" b="0" i="1">
+                <a:solidFill>
+                  <a:srgbClr val="AAAAAA"/>
                 </a:solidFill>
                 <a:latin typeface="Arial"/>
               </a:rPr>
-              <a:t>飲み込んでゆく</a:t>
+              <a:t>nomi konde yuku u</a:t>
             </a:r>
           </a:p>
         </p:txBody>
@@ -5032,8 +4612,8 @@
         </p:nvSpPr>
         <p:spPr>
           <a:xfrm>
-            <a:off x="594360" y="4251960"/>
-            <a:ext cx="11002975" cy="384048"/>
+            <a:off x="640080" y="4530852"/>
+            <a:ext cx="10911535" cy="310896"/>
           </a:xfrm>
           <a:prstGeom prst="rect">
             <a:avLst/>
@@ -5048,13 +4628,13 @@
           <a:p>
             <a:pPr algn="ctr"/>
             <a:r>
-              <a:rPr sz="2400" b="0" i="1">
-                <a:solidFill>
-                  <a:srgbClr val="B4B4B4"/>
+              <a:rPr sz="2000" b="0" i="1">
+                <a:solidFill>
+                  <a:srgbClr val="828282"/>
                 </a:solidFill>
                 <a:latin typeface="Arial"/>
               </a:rPr>
-              <a:t>nomi konde yuku u</a:t>
+              <a:t>Tudo que tem fôlego</a:t>
             </a:r>
           </a:p>
         </p:txBody>
@@ -5067,8 +4647,8 @@
         </p:nvSpPr>
         <p:spPr>
           <a:xfrm>
-            <a:off x="594360" y="4672584"/>
-            <a:ext cx="11002975" cy="347472"/>
+            <a:off x="640080" y="4896612"/>
+            <a:ext cx="10911535" cy="310896"/>
           </a:xfrm>
           <a:prstGeom prst="rect">
             <a:avLst/>
@@ -5085,11 +4665,11 @@
             <a:r>
               <a:rPr sz="2000" b="0" i="1">
                 <a:solidFill>
-                  <a:srgbClr val="8C8C8C"/>
+                  <a:srgbClr val="828282"/>
                 </a:solidFill>
                 <a:latin typeface="Arial"/>
               </a:rPr>
-              <a:t/>
+              <a:t>Louve ao Senhor, louve ao Senhor</a:t>
             </a:r>
           </a:p>
         </p:txBody>
@@ -5128,8 +4708,8 @@
         </p:nvSpPr>
         <p:spPr>
           <a:xfrm>
-            <a:off x="594360" y="1837944"/>
-            <a:ext cx="11002975" cy="685800"/>
+            <a:off x="640080" y="1650492"/>
+            <a:ext cx="10911535" cy="731520"/>
           </a:xfrm>
           <a:prstGeom prst="rect">
             <a:avLst/>
@@ -5144,7 +4724,7 @@
           <a:p>
             <a:pPr algn="ctr"/>
             <a:r>
-              <a:rPr sz="4400" b="1" i="0">
+              <a:rPr sz="4800" b="1" i="0">
                 <a:solidFill>
                   <a:srgbClr val="FFFFFF"/>
                 </a:solidFill>
@@ -5163,8 +4743,8 @@
         </p:nvSpPr>
         <p:spPr>
           <a:xfrm>
-            <a:off x="594360" y="2560320"/>
-            <a:ext cx="11002975" cy="384048"/>
+            <a:off x="640080" y="2418588"/>
+            <a:ext cx="10911535" cy="365760"/>
           </a:xfrm>
           <a:prstGeom prst="rect">
             <a:avLst/>
@@ -5181,7 +4761,7 @@
             <a:r>
               <a:rPr sz="2400" b="0" i="1">
                 <a:solidFill>
-                  <a:srgbClr val="B4B4B4"/>
+                  <a:srgbClr val="AAAAAA"/>
                 </a:solidFill>
                 <a:latin typeface="Arial"/>
               </a:rPr>
@@ -5198,8 +4778,8 @@
         </p:nvSpPr>
         <p:spPr>
           <a:xfrm>
-            <a:off x="594360" y="2980944"/>
-            <a:ext cx="11002975" cy="347472"/>
+            <a:off x="640080" y="2985516"/>
+            <a:ext cx="10911535" cy="731520"/>
           </a:xfrm>
           <a:prstGeom prst="rect">
             <a:avLst/>
@@ -5214,9 +4794,79 @@
           <a:p>
             <a:pPr algn="ctr"/>
             <a:r>
+              <a:rPr sz="4800" b="1" i="0">
+                <a:solidFill>
+                  <a:srgbClr val="FFFFFF"/>
+                </a:solidFill>
+                <a:latin typeface="Arial"/>
+              </a:rPr>
+              <a:t>主あなたへ</a:t>
+            </a:r>
+          </a:p>
+        </p:txBody>
+      </p:sp>
+      <p:sp>
+        <p:nvSpPr>
+          <p:cNvPr id="5" name="TextBox 4"/>
+          <p:cNvSpPr txBox="1"/>
+          <p:nvPr/>
+        </p:nvSpPr>
+        <p:spPr>
+          <a:xfrm>
+            <a:off x="640080" y="3753612"/>
+            <a:ext cx="10911535" cy="365760"/>
+          </a:xfrm>
+          <a:prstGeom prst="rect">
+            <a:avLst/>
+          </a:prstGeom>
+          <a:noFill/>
+        </p:spPr>
+        <p:txBody>
+          <a:bodyPr wrap="square">
+            <a:spAutoFit/>
+          </a:bodyPr>
+          <a:lstStyle/>
+          <a:p>
+            <a:pPr algn="ctr"/>
+            <a:r>
+              <a:rPr sz="2400" b="0" i="1">
+                <a:solidFill>
+                  <a:srgbClr val="AAAAAA"/>
+                </a:solidFill>
+                <a:latin typeface="Arial"/>
+              </a:rPr>
+              <a:t>shu anata e</a:t>
+            </a:r>
+          </a:p>
+        </p:txBody>
+      </p:sp>
+      <p:sp>
+        <p:nvSpPr>
+          <p:cNvPr id="6" name="TextBox 5"/>
+          <p:cNvSpPr txBox="1"/>
+          <p:nvPr/>
+        </p:nvSpPr>
+        <p:spPr>
+          <a:xfrm>
+            <a:off x="640080" y="4530852"/>
+            <a:ext cx="10911535" cy="310896"/>
+          </a:xfrm>
+          <a:prstGeom prst="rect">
+            <a:avLst/>
+          </a:prstGeom>
+          <a:noFill/>
+        </p:spPr>
+        <p:txBody>
+          <a:bodyPr wrap="square">
+            <a:spAutoFit/>
+          </a:bodyPr>
+          <a:lstStyle/>
+          <a:p>
+            <a:pPr algn="ctr"/>
+            <a:r>
               <a:rPr sz="2000" b="0" i="1">
                 <a:solidFill>
-                  <a:srgbClr val="8C8C8C"/>
+                  <a:srgbClr val="828282"/>
                 </a:solidFill>
                 <a:latin typeface="Arial"/>
               </a:rPr>
@@ -5227,84 +4877,14 @@
       </p:sp>
       <p:sp>
         <p:nvSpPr>
-          <p:cNvPr id="5" name="TextBox 4"/>
-          <p:cNvSpPr txBox="1"/>
-          <p:nvPr/>
-        </p:nvSpPr>
-        <p:spPr>
-          <a:xfrm>
-            <a:off x="594360" y="3529584"/>
-            <a:ext cx="11002975" cy="685800"/>
-          </a:xfrm>
-          <a:prstGeom prst="rect">
-            <a:avLst/>
-          </a:prstGeom>
-          <a:noFill/>
-        </p:spPr>
-        <p:txBody>
-          <a:bodyPr wrap="square">
-            <a:spAutoFit/>
-          </a:bodyPr>
-          <a:lstStyle/>
-          <a:p>
-            <a:pPr algn="ctr"/>
-            <a:r>
-              <a:rPr sz="4400" b="1" i="0">
-                <a:solidFill>
-                  <a:srgbClr val="FFFFFF"/>
-                </a:solidFill>
-                <a:latin typeface="Arial"/>
-              </a:rPr>
-              <a:t>主あなたへ</a:t>
-            </a:r>
-          </a:p>
-        </p:txBody>
-      </p:sp>
-      <p:sp>
-        <p:nvSpPr>
-          <p:cNvPr id="6" name="TextBox 5"/>
-          <p:cNvSpPr txBox="1"/>
-          <p:nvPr/>
-        </p:nvSpPr>
-        <p:spPr>
-          <a:xfrm>
-            <a:off x="594360" y="4251960"/>
-            <a:ext cx="11002975" cy="384048"/>
-          </a:xfrm>
-          <a:prstGeom prst="rect">
-            <a:avLst/>
-          </a:prstGeom>
-          <a:noFill/>
-        </p:spPr>
-        <p:txBody>
-          <a:bodyPr wrap="square">
-            <a:spAutoFit/>
-          </a:bodyPr>
-          <a:lstStyle/>
-          <a:p>
-            <a:pPr algn="ctr"/>
-            <a:r>
-              <a:rPr sz="2400" b="0" i="1">
-                <a:solidFill>
-                  <a:srgbClr val="B4B4B4"/>
-                </a:solidFill>
-                <a:latin typeface="Arial"/>
-              </a:rPr>
-              <a:t>shu anata e</a:t>
-            </a:r>
-          </a:p>
-        </p:txBody>
-      </p:sp>
-      <p:sp>
-        <p:nvSpPr>
           <p:cNvPr id="7" name="TextBox 6"/>
           <p:cNvSpPr txBox="1"/>
           <p:nvPr/>
         </p:nvSpPr>
         <p:spPr>
           <a:xfrm>
-            <a:off x="594360" y="4672584"/>
-            <a:ext cx="11002975" cy="347472"/>
+            <a:off x="640080" y="4896612"/>
+            <a:ext cx="10911535" cy="310896"/>
           </a:xfrm>
           <a:prstGeom prst="rect">
             <a:avLst/>
@@ -5321,7 +4901,7 @@
             <a:r>
               <a:rPr sz="2000" b="0" i="1">
                 <a:solidFill>
-                  <a:srgbClr val="8C8C8C"/>
+                  <a:srgbClr val="828282"/>
                 </a:solidFill>
                 <a:latin typeface="Arial"/>
               </a:rPr>
@@ -5364,8 +4944,8 @@
         </p:nvSpPr>
         <p:spPr>
           <a:xfrm>
-            <a:off x="594360" y="1837944"/>
-            <a:ext cx="11002975" cy="685800"/>
+            <a:off x="640080" y="1650492"/>
+            <a:ext cx="10911535" cy="731520"/>
           </a:xfrm>
           <a:prstGeom prst="rect">
             <a:avLst/>
@@ -5380,7 +4960,7 @@
           <a:p>
             <a:pPr algn="ctr"/>
             <a:r>
-              <a:rPr sz="4400" b="1" i="0">
+              <a:rPr sz="4800" b="1" i="0">
                 <a:solidFill>
                   <a:srgbClr val="FFFFFF"/>
                 </a:solidFill>
@@ -5399,8 +4979,8 @@
         </p:nvSpPr>
         <p:spPr>
           <a:xfrm>
-            <a:off x="594360" y="2560320"/>
-            <a:ext cx="11002975" cy="384048"/>
+            <a:off x="640080" y="2418588"/>
+            <a:ext cx="10911535" cy="365760"/>
           </a:xfrm>
           <a:prstGeom prst="rect">
             <a:avLst/>
@@ -5417,7 +4997,7 @@
             <a:r>
               <a:rPr sz="2400" b="0" i="1">
                 <a:solidFill>
-                  <a:srgbClr val="B4B4B4"/>
+                  <a:srgbClr val="AAAAAA"/>
                 </a:solidFill>
                 <a:latin typeface="Arial"/>
               </a:rPr>
@@ -5434,8 +5014,8 @@
         </p:nvSpPr>
         <p:spPr>
           <a:xfrm>
-            <a:off x="594360" y="2980944"/>
-            <a:ext cx="11002975" cy="347472"/>
+            <a:off x="640080" y="2985516"/>
+            <a:ext cx="10911535" cy="731520"/>
           </a:xfrm>
           <a:prstGeom prst="rect">
             <a:avLst/>
@@ -5450,13 +5030,13 @@
           <a:p>
             <a:pPr algn="ctr"/>
             <a:r>
-              <a:rPr sz="2000" b="0" i="1">
-                <a:solidFill>
-                  <a:srgbClr val="8C8C8C"/>
+              <a:rPr sz="4800" b="1" i="0">
+                <a:solidFill>
+                  <a:srgbClr val="FFFFFF"/>
                 </a:solidFill>
                 <a:latin typeface="Arial"/>
               </a:rPr>
-              <a:t/>
+              <a:t>こえーあげ たたえよ 魂よ</a:t>
             </a:r>
           </a:p>
         </p:txBody>
@@ -5469,8 +5049,8 @@
         </p:nvSpPr>
         <p:spPr>
           <a:xfrm>
-            <a:off x="594360" y="3529584"/>
-            <a:ext cx="11002975" cy="685800"/>
+            <a:off x="640080" y="3753612"/>
+            <a:ext cx="10911535" cy="365760"/>
           </a:xfrm>
           <a:prstGeom prst="rect">
             <a:avLst/>
@@ -5485,13 +5065,13 @@
           <a:p>
             <a:pPr algn="ctr"/>
             <a:r>
-              <a:rPr sz="4400" b="1" i="0">
-                <a:solidFill>
-                  <a:srgbClr val="FFFFFF"/>
+              <a:rPr sz="2400" b="0" i="1">
+                <a:solidFill>
+                  <a:srgbClr val="AAAAAA"/>
                 </a:solidFill>
                 <a:latin typeface="Arial"/>
               </a:rPr>
-              <a:t>こえーあげ たたえよ 魂よ</a:t>
+              <a:t>koe age tataeyo tamashii yo</a:t>
             </a:r>
           </a:p>
         </p:txBody>
@@ -5504,8 +5084,8 @@
         </p:nvSpPr>
         <p:spPr>
           <a:xfrm>
-            <a:off x="594360" y="4251960"/>
-            <a:ext cx="11002975" cy="384048"/>
+            <a:off x="640080" y="4530852"/>
+            <a:ext cx="10911535" cy="310896"/>
           </a:xfrm>
           <a:prstGeom prst="rect">
             <a:avLst/>
@@ -5520,13 +5100,13 @@
           <a:p>
             <a:pPr algn="ctr"/>
             <a:r>
-              <a:rPr sz="2400" b="0" i="1">
-                <a:solidFill>
-                  <a:srgbClr val="B4B4B4"/>
+              <a:rPr sz="2000" b="0" i="1">
+                <a:solidFill>
+                  <a:srgbClr val="828282"/>
                 </a:solidFill>
                 <a:latin typeface="Arial"/>
               </a:rPr>
-              <a:t>koe age tataeyo tamashii yo</a:t>
+              <a:t>Eu vou louvar</a:t>
             </a:r>
           </a:p>
         </p:txBody>
@@ -5539,8 +5119,8 @@
         </p:nvSpPr>
         <p:spPr>
           <a:xfrm>
-            <a:off x="594360" y="4672584"/>
-            <a:ext cx="11002975" cy="347472"/>
+            <a:off x="640080" y="4896612"/>
+            <a:ext cx="10911535" cy="310896"/>
           </a:xfrm>
           <a:prstGeom prst="rect">
             <a:avLst/>
@@ -5557,11 +5137,11 @@
             <a:r>
               <a:rPr sz="2000" b="0" i="1">
                 <a:solidFill>
-                  <a:srgbClr val="8C8C8C"/>
+                  <a:srgbClr val="828282"/>
                 </a:solidFill>
                 <a:latin typeface="Arial"/>
               </a:rPr>
-              <a:t/>
+              <a:t>Louve ao Senhor</a:t>
             </a:r>
           </a:p>
         </p:txBody>
@@ -5600,8 +5180,8 @@
         </p:nvSpPr>
         <p:spPr>
           <a:xfrm>
-            <a:off x="594360" y="2258568"/>
-            <a:ext cx="11002975" cy="685800"/>
+            <a:off x="640080" y="2052828"/>
+            <a:ext cx="10911535" cy="731520"/>
           </a:xfrm>
           <a:prstGeom prst="rect">
             <a:avLst/>
@@ -5616,7 +5196,7 @@
           <a:p>
             <a:pPr algn="ctr"/>
             <a:r>
-              <a:rPr sz="4022" b="1" i="0">
+              <a:rPr sz="4300" b="1" i="0">
                 <a:solidFill>
                   <a:srgbClr val="FFFFFF"/>
                 </a:solidFill>
@@ -5635,8 +5215,8 @@
         </p:nvSpPr>
         <p:spPr>
           <a:xfrm>
-            <a:off x="594360" y="2980944"/>
-            <a:ext cx="11002975" cy="347472"/>
+            <a:off x="640080" y="2985516"/>
+            <a:ext cx="10911535" cy="731520"/>
           </a:xfrm>
           <a:prstGeom prst="rect">
             <a:avLst/>
@@ -5651,83 +5231,13 @@
           <a:p>
             <a:pPr algn="ctr"/>
             <a:r>
-              <a:rPr sz="2200" b="0" i="1">
-                <a:solidFill>
-                  <a:srgbClr val="8C8C8C"/>
-                </a:solidFill>
-                <a:latin typeface="Arial"/>
-              </a:rPr>
-              <a:t/>
-            </a:r>
-          </a:p>
-        </p:txBody>
-      </p:sp>
-      <p:sp>
-        <p:nvSpPr>
-          <p:cNvPr id="4" name="TextBox 3"/>
-          <p:cNvSpPr txBox="1"/>
-          <p:nvPr/>
-        </p:nvSpPr>
-        <p:spPr>
-          <a:xfrm>
-            <a:off x="594360" y="3529584"/>
-            <a:ext cx="11002975" cy="685800"/>
-          </a:xfrm>
-          <a:prstGeom prst="rect">
-            <a:avLst/>
-          </a:prstGeom>
-          <a:noFill/>
-        </p:spPr>
-        <p:txBody>
-          <a:bodyPr wrap="square">
-            <a:spAutoFit/>
-          </a:bodyPr>
-          <a:lstStyle/>
-          <a:p>
-            <a:pPr algn="ctr"/>
-            <a:r>
-              <a:rPr sz="4400" b="1" i="0">
+              <a:rPr sz="4800" b="1" i="0">
                 <a:solidFill>
                   <a:srgbClr val="FFFFFF"/>
                 </a:solidFill>
                 <a:latin typeface="Arial"/>
               </a:rPr>
               <a:t>Louvarei quando estiver perdendo</a:t>
-            </a:r>
-          </a:p>
-        </p:txBody>
-      </p:sp>
-      <p:sp>
-        <p:nvSpPr>
-          <p:cNvPr id="5" name="TextBox 4"/>
-          <p:cNvSpPr txBox="1"/>
-          <p:nvPr/>
-        </p:nvSpPr>
-        <p:spPr>
-          <a:xfrm>
-            <a:off x="594360" y="4251960"/>
-            <a:ext cx="11002975" cy="347472"/>
-          </a:xfrm>
-          <a:prstGeom prst="rect">
-            <a:avLst/>
-          </a:prstGeom>
-          <a:noFill/>
-        </p:spPr>
-        <p:txBody>
-          <a:bodyPr wrap="square">
-            <a:spAutoFit/>
-          </a:bodyPr>
-          <a:lstStyle/>
-          <a:p>
-            <a:pPr algn="ctr"/>
-            <a:r>
-              <a:rPr sz="2200" b="0" i="1">
-                <a:solidFill>
-                  <a:srgbClr val="8C8C8C"/>
-                </a:solidFill>
-                <a:latin typeface="Arial"/>
-              </a:rPr>
-              <a:t/>
             </a:r>
           </a:p>
         </p:txBody>
@@ -5766,8 +5276,8 @@
         </p:nvSpPr>
         <p:spPr>
           <a:xfrm>
-            <a:off x="594360" y="2258568"/>
-            <a:ext cx="11002975" cy="685800"/>
+            <a:off x="640080" y="2052828"/>
+            <a:ext cx="10911535" cy="731520"/>
           </a:xfrm>
           <a:prstGeom prst="rect">
             <a:avLst/>
@@ -5782,7 +5292,7 @@
           <a:p>
             <a:pPr algn="ctr"/>
             <a:r>
-              <a:rPr sz="4400" b="1" i="0">
+              <a:rPr sz="4800" b="1" i="0">
                 <a:solidFill>
                   <a:srgbClr val="FFFFFF"/>
                 </a:solidFill>
@@ -5801,8 +5311,8 @@
         </p:nvSpPr>
         <p:spPr>
           <a:xfrm>
-            <a:off x="594360" y="2980944"/>
-            <a:ext cx="11002975" cy="347472"/>
+            <a:off x="640080" y="2985516"/>
+            <a:ext cx="10911535" cy="731520"/>
           </a:xfrm>
           <a:prstGeom prst="rect">
             <a:avLst/>
@@ -5817,83 +5327,13 @@
           <a:p>
             <a:pPr algn="ctr"/>
             <a:r>
-              <a:rPr sz="2200" b="0" i="1">
-                <a:solidFill>
-                  <a:srgbClr val="8C8C8C"/>
-                </a:solidFill>
-                <a:latin typeface="Arial"/>
-              </a:rPr>
-              <a:t/>
-            </a:r>
-          </a:p>
-        </p:txBody>
-      </p:sp>
-      <p:sp>
-        <p:nvSpPr>
-          <p:cNvPr id="4" name="TextBox 3"/>
-          <p:cNvSpPr txBox="1"/>
-          <p:nvPr/>
-        </p:nvSpPr>
-        <p:spPr>
-          <a:xfrm>
-            <a:off x="594360" y="3529584"/>
-            <a:ext cx="11002975" cy="685800"/>
-          </a:xfrm>
-          <a:prstGeom prst="rect">
-            <a:avLst/>
-          </a:prstGeom>
-          <a:noFill/>
-        </p:spPr>
-        <p:txBody>
-          <a:bodyPr wrap="square">
-            <a:spAutoFit/>
-          </a:bodyPr>
-          <a:lstStyle/>
-          <a:p>
-            <a:pPr algn="ctr"/>
-            <a:r>
-              <a:rPr sz="4400" b="1" i="0">
+              <a:rPr sz="4800" b="1" i="0">
                 <a:solidFill>
                   <a:srgbClr val="FFFFFF"/>
                 </a:solidFill>
                 <a:latin typeface="Arial"/>
               </a:rPr>
               <a:t>E há razões demais para louvar</a:t>
-            </a:r>
-          </a:p>
-        </p:txBody>
-      </p:sp>
-      <p:sp>
-        <p:nvSpPr>
-          <p:cNvPr id="5" name="TextBox 4"/>
-          <p:cNvSpPr txBox="1"/>
-          <p:nvPr/>
-        </p:nvSpPr>
-        <p:spPr>
-          <a:xfrm>
-            <a:off x="594360" y="4251960"/>
-            <a:ext cx="11002975" cy="347472"/>
-          </a:xfrm>
-          <a:prstGeom prst="rect">
-            <a:avLst/>
-          </a:prstGeom>
-          <a:noFill/>
-        </p:spPr>
-        <p:txBody>
-          <a:bodyPr wrap="square">
-            <a:spAutoFit/>
-          </a:bodyPr>
-          <a:lstStyle/>
-          <a:p>
-            <a:pPr algn="ctr"/>
-            <a:r>
-              <a:rPr sz="2200" b="0" i="1">
-                <a:solidFill>
-                  <a:srgbClr val="8C8C8C"/>
-                </a:solidFill>
-                <a:latin typeface="Arial"/>
-              </a:rPr>
-              <a:t/>
             </a:r>
           </a:p>
         </p:txBody>
@@ -5932,8 +5372,8 @@
         </p:nvSpPr>
         <p:spPr>
           <a:xfrm>
-            <a:off x="594360" y="1837944"/>
-            <a:ext cx="11002975" cy="685800"/>
+            <a:off x="640080" y="1650492"/>
+            <a:ext cx="10911535" cy="731520"/>
           </a:xfrm>
           <a:prstGeom prst="rect">
             <a:avLst/>
@@ -5948,7 +5388,7 @@
           <a:p>
             <a:pPr algn="ctr"/>
             <a:r>
-              <a:rPr sz="4400" b="1" i="0">
+              <a:rPr sz="4800" b="1" i="0">
                 <a:solidFill>
                   <a:srgbClr val="FFFFFF"/>
                 </a:solidFill>
@@ -5967,8 +5407,8 @@
         </p:nvSpPr>
         <p:spPr>
           <a:xfrm>
-            <a:off x="594360" y="2560320"/>
-            <a:ext cx="11002975" cy="384048"/>
+            <a:off x="640080" y="2418588"/>
+            <a:ext cx="10911535" cy="365760"/>
           </a:xfrm>
           <a:prstGeom prst="rect">
             <a:avLst/>
@@ -5985,7 +5425,7 @@
             <a:r>
               <a:rPr sz="2400" b="0" i="1">
                 <a:solidFill>
-                  <a:srgbClr val="B4B4B4"/>
+                  <a:srgbClr val="AAAAAA"/>
                 </a:solidFill>
                 <a:latin typeface="Arial"/>
               </a:rPr>
@@ -6002,8 +5442,8 @@
         </p:nvSpPr>
         <p:spPr>
           <a:xfrm>
-            <a:off x="594360" y="2980944"/>
-            <a:ext cx="11002975" cy="347472"/>
+            <a:off x="640080" y="2985516"/>
+            <a:ext cx="10911535" cy="731520"/>
           </a:xfrm>
           <a:prstGeom prst="rect">
             <a:avLst/>
@@ -6018,13 +5458,13 @@
           <a:p>
             <a:pPr algn="ctr"/>
             <a:r>
-              <a:rPr sz="2000" b="0" i="1">
-                <a:solidFill>
-                  <a:srgbClr val="8C8C8C"/>
+              <a:rPr sz="4800" b="1" i="0">
+                <a:solidFill>
+                  <a:srgbClr val="FFFFFF"/>
                 </a:solidFill>
                 <a:latin typeface="Arial"/>
               </a:rPr>
-              <a:t/>
+              <a:t>選べない時も</a:t>
             </a:r>
           </a:p>
         </p:txBody>
@@ -6037,8 +5477,8 @@
         </p:nvSpPr>
         <p:spPr>
           <a:xfrm>
-            <a:off x="594360" y="3529584"/>
-            <a:ext cx="11002975" cy="685800"/>
+            <a:off x="640080" y="3753612"/>
+            <a:ext cx="10911535" cy="365760"/>
           </a:xfrm>
           <a:prstGeom prst="rect">
             <a:avLst/>
@@ -6053,13 +5493,13 @@
           <a:p>
             <a:pPr algn="ctr"/>
             <a:r>
-              <a:rPr sz="4400" b="1" i="0">
-                <a:solidFill>
-                  <a:srgbClr val="FFFFFF"/>
+              <a:rPr sz="2400" b="0" i="1">
+                <a:solidFill>
+                  <a:srgbClr val="AAAAAA"/>
                 </a:solidFill>
                 <a:latin typeface="Arial"/>
               </a:rPr>
-              <a:t>選べない時も</a:t>
+              <a:t>erabe nai toki mo</a:t>
             </a:r>
           </a:p>
         </p:txBody>
@@ -6072,8 +5512,8 @@
         </p:nvSpPr>
         <p:spPr>
           <a:xfrm>
-            <a:off x="594360" y="4251960"/>
-            <a:ext cx="11002975" cy="384048"/>
+            <a:off x="640080" y="4530852"/>
+            <a:ext cx="10911535" cy="310896"/>
           </a:xfrm>
           <a:prstGeom prst="rect">
             <a:avLst/>
@@ -6088,13 +5528,13 @@
           <a:p>
             <a:pPr algn="ctr"/>
             <a:r>
-              <a:rPr sz="2400" b="0" i="1">
-                <a:solidFill>
-                  <a:srgbClr val="B4B4B4"/>
+              <a:rPr sz="2000" b="0" i="1">
+                <a:solidFill>
+                  <a:srgbClr val="828282"/>
                 </a:solidFill>
                 <a:latin typeface="Arial"/>
               </a:rPr>
-              <a:t>erabe nai toki mo</a:t>
+              <a:t>Louvarei porque Você é soberano</a:t>
             </a:r>
           </a:p>
         </p:txBody>
@@ -6107,8 +5547,8 @@
         </p:nvSpPr>
         <p:spPr>
           <a:xfrm>
-            <a:off x="594360" y="4672584"/>
-            <a:ext cx="11002975" cy="347472"/>
+            <a:off x="640080" y="4896612"/>
+            <a:ext cx="10911535" cy="310896"/>
           </a:xfrm>
           <a:prstGeom prst="rect">
             <a:avLst/>
@@ -6125,11 +5565,11 @@
             <a:r>
               <a:rPr sz="2000" b="0" i="1">
                 <a:solidFill>
-                  <a:srgbClr val="8C8C8C"/>
+                  <a:srgbClr val="828282"/>
                 </a:solidFill>
                 <a:latin typeface="Arial"/>
               </a:rPr>
-              <a:t/>
+              <a:t>Louvarei porque Você reina</a:t>
             </a:r>
           </a:p>
         </p:txBody>

--- a/output_pptx/Praise.pptx
+++ b/output_pptx/Praise.pptx
@@ -3180,6 +3180,76 @@
           </a:p>
         </p:txBody>
       </p:sp>
+      <p:sp>
+        <p:nvSpPr>
+          <p:cNvPr id="4" name="TextBox 3"/>
+          <p:cNvSpPr txBox="1"/>
+          <p:nvPr/>
+        </p:nvSpPr>
+        <p:spPr>
+          <a:xfrm>
+            <a:off x="640080" y="4128516"/>
+            <a:ext cx="10911535" cy="310896"/>
+          </a:xfrm>
+          <a:prstGeom prst="rect">
+            <a:avLst/>
+          </a:prstGeom>
+          <a:noFill/>
+        </p:spPr>
+        <p:txBody>
+          <a:bodyPr wrap="square">
+            <a:spAutoFit/>
+          </a:bodyPr>
+          <a:lstStyle/>
+          <a:p>
+            <a:pPr algn="ctr"/>
+            <a:r>
+              <a:rPr sz="2000" b="0" i="0">
+                <a:solidFill>
+                  <a:srgbClr val="828282"/>
+                </a:solidFill>
+                <a:latin typeface="Arial"/>
+              </a:rPr>
+              <a:t>あなたが主権者だから賛美します</a:t>
+            </a:r>
+          </a:p>
+        </p:txBody>
+      </p:sp>
+      <p:sp>
+        <p:nvSpPr>
+          <p:cNvPr id="5" name="TextBox 4"/>
+          <p:cNvSpPr txBox="1"/>
+          <p:nvPr/>
+        </p:nvSpPr>
+        <p:spPr>
+          <a:xfrm>
+            <a:off x="640080" y="4494276"/>
+            <a:ext cx="10911535" cy="310896"/>
+          </a:xfrm>
+          <a:prstGeom prst="rect">
+            <a:avLst/>
+          </a:prstGeom>
+          <a:noFill/>
+        </p:spPr>
+        <p:txBody>
+          <a:bodyPr wrap="square">
+            <a:spAutoFit/>
+          </a:bodyPr>
+          <a:lstStyle/>
+          <a:p>
+            <a:pPr algn="ctr"/>
+            <a:r>
+              <a:rPr sz="2000" b="0" i="0">
+                <a:solidFill>
+                  <a:srgbClr val="828282"/>
+                </a:solidFill>
+                <a:latin typeface="Arial"/>
+              </a:rPr>
+              <a:t>あなたが統治しているから賛美します</a:t>
+            </a:r>
+          </a:p>
+        </p:txBody>
+      </p:sp>
     </p:spTree>
   </p:cSld>
   <p:clrMapOvr>
@@ -3678,6 +3748,76 @@
           </a:p>
         </p:txBody>
       </p:sp>
+      <p:sp>
+        <p:nvSpPr>
+          <p:cNvPr id="4" name="TextBox 3"/>
+          <p:cNvSpPr txBox="1"/>
+          <p:nvPr/>
+        </p:nvSpPr>
+        <p:spPr>
+          <a:xfrm>
+            <a:off x="640080" y="4128516"/>
+            <a:ext cx="10911535" cy="310896"/>
+          </a:xfrm>
+          <a:prstGeom prst="rect">
+            <a:avLst/>
+          </a:prstGeom>
+          <a:noFill/>
+        </p:spPr>
+        <p:txBody>
+          <a:bodyPr wrap="square">
+            <a:spAutoFit/>
+          </a:bodyPr>
+          <a:lstStyle/>
+          <a:p>
+            <a:pPr algn="ctr"/>
+            <a:r>
+              <a:rPr sz="2000" b="0" i="0">
+                <a:solidFill>
+                  <a:srgbClr val="828282"/>
+                </a:solidFill>
+                <a:latin typeface="Arial"/>
+              </a:rPr>
+              <a:t>私は賛美します</a:t>
+            </a:r>
+          </a:p>
+        </p:txBody>
+      </p:sp>
+      <p:sp>
+        <p:nvSpPr>
+          <p:cNvPr id="5" name="TextBox 4"/>
+          <p:cNvSpPr txBox="1"/>
+          <p:nvPr/>
+        </p:nvSpPr>
+        <p:spPr>
+          <a:xfrm>
+            <a:off x="640080" y="4494276"/>
+            <a:ext cx="10911535" cy="310896"/>
+          </a:xfrm>
+          <a:prstGeom prst="rect">
+            <a:avLst/>
+          </a:prstGeom>
+          <a:noFill/>
+        </p:spPr>
+        <p:txBody>
+          <a:bodyPr wrap="square">
+            <a:spAutoFit/>
+          </a:bodyPr>
+          <a:lstStyle/>
+          <a:p>
+            <a:pPr algn="ctr"/>
+            <a:r>
+              <a:rPr sz="2000" b="0" i="0">
+                <a:solidFill>
+                  <a:srgbClr val="828282"/>
+                </a:solidFill>
+                <a:latin typeface="Arial"/>
+              </a:rPr>
+              <a:t>主を賛美せよ</a:t>
+            </a:r>
+          </a:p>
+        </p:txBody>
+      </p:sp>
     </p:spTree>
   </p:cSld>
   <p:clrMapOvr>
@@ -3774,6 +3914,76 @@
           </a:p>
         </p:txBody>
       </p:sp>
+      <p:sp>
+        <p:nvSpPr>
+          <p:cNvPr id="4" name="TextBox 3"/>
+          <p:cNvSpPr txBox="1"/>
+          <p:nvPr/>
+        </p:nvSpPr>
+        <p:spPr>
+          <a:xfrm>
+            <a:off x="640080" y="4128516"/>
+            <a:ext cx="10911535" cy="310896"/>
+          </a:xfrm>
+          <a:prstGeom prst="rect">
+            <a:avLst/>
+          </a:prstGeom>
+          <a:noFill/>
+        </p:spPr>
+        <p:txBody>
+          <a:bodyPr wrap="square">
+            <a:spAutoFit/>
+          </a:bodyPr>
+          <a:lstStyle/>
+          <a:p>
+            <a:pPr algn="ctr"/>
+            <a:r>
+              <a:rPr sz="2000" b="0" i="0">
+                <a:solidFill>
+                  <a:srgbClr val="828282"/>
+                </a:solidFill>
+                <a:latin typeface="Arial"/>
+              </a:rPr>
+              <a:t>私は賛美します</a:t>
+            </a:r>
+          </a:p>
+        </p:txBody>
+      </p:sp>
+      <p:sp>
+        <p:nvSpPr>
+          <p:cNvPr id="5" name="TextBox 4"/>
+          <p:cNvSpPr txBox="1"/>
+          <p:nvPr/>
+        </p:nvSpPr>
+        <p:spPr>
+          <a:xfrm>
+            <a:off x="640080" y="4494276"/>
+            <a:ext cx="10911535" cy="310896"/>
+          </a:xfrm>
+          <a:prstGeom prst="rect">
+            <a:avLst/>
+          </a:prstGeom>
+          <a:noFill/>
+        </p:spPr>
+        <p:txBody>
+          <a:bodyPr wrap="square">
+            <a:spAutoFit/>
+          </a:bodyPr>
+          <a:lstStyle/>
+          <a:p>
+            <a:pPr algn="ctr"/>
+            <a:r>
+              <a:rPr sz="2000" b="0" i="0">
+                <a:solidFill>
+                  <a:srgbClr val="828282"/>
+                </a:solidFill>
+                <a:latin typeface="Arial"/>
+              </a:rPr>
+              <a:t>主を賛美せよ</a:t>
+            </a:r>
+          </a:p>
+        </p:txBody>
+      </p:sp>
     </p:spTree>
   </p:cSld>
   <p:clrMapOvr>
@@ -3940,6 +4150,76 @@
           </a:p>
         </p:txBody>
       </p:sp>
+      <p:sp>
+        <p:nvSpPr>
+          <p:cNvPr id="6" name="TextBox 5"/>
+          <p:cNvSpPr txBox="1"/>
+          <p:nvPr/>
+        </p:nvSpPr>
+        <p:spPr>
+          <a:xfrm>
+            <a:off x="640080" y="4530852"/>
+            <a:ext cx="10911535" cy="310896"/>
+          </a:xfrm>
+          <a:prstGeom prst="rect">
+            <a:avLst/>
+          </a:prstGeom>
+          <a:noFill/>
+        </p:spPr>
+        <p:txBody>
+          <a:bodyPr wrap="square">
+            <a:spAutoFit/>
+          </a:bodyPr>
+          <a:lstStyle/>
+          <a:p>
+            <a:pPr algn="ctr"/>
+            <a:r>
+              <a:rPr sz="2000" b="0" i="1">
+                <a:solidFill>
+                  <a:srgbClr val="828282"/>
+                </a:solidFill>
+                <a:latin typeface="Arial"/>
+              </a:rPr>
+              <a:t>O Todo-Poderoso que reina soberano</a:t>
+            </a:r>
+          </a:p>
+        </p:txBody>
+      </p:sp>
+      <p:sp>
+        <p:nvSpPr>
+          <p:cNvPr id="7" name="TextBox 6"/>
+          <p:cNvSpPr txBox="1"/>
+          <p:nvPr/>
+        </p:nvSpPr>
+        <p:spPr>
+          <a:xfrm>
+            <a:off x="640080" y="4896612"/>
+            <a:ext cx="10911535" cy="310896"/>
+          </a:xfrm>
+          <a:prstGeom prst="rect">
+            <a:avLst/>
+          </a:prstGeom>
+          <a:noFill/>
+        </p:spPr>
+        <p:txBody>
+          <a:bodyPr wrap="square">
+            <a:spAutoFit/>
+          </a:bodyPr>
+          <a:lstStyle/>
+          <a:p>
+            <a:pPr algn="ctr"/>
+            <a:r>
+              <a:rPr sz="2000" b="0" i="1">
+                <a:solidFill>
+                  <a:srgbClr val="828282"/>
+                </a:solidFill>
+                <a:latin typeface="Arial"/>
+              </a:rPr>
+              <a:t>Senhor ressurreto, vitorioso</a:t>
+            </a:r>
+          </a:p>
+        </p:txBody>
+      </p:sp>
     </p:spTree>
   </p:cSld>
   <p:clrMapOvr>
@@ -4106,6 +4386,76 @@
           </a:p>
         </p:txBody>
       </p:sp>
+      <p:sp>
+        <p:nvSpPr>
+          <p:cNvPr id="6" name="TextBox 5"/>
+          <p:cNvSpPr txBox="1"/>
+          <p:nvPr/>
+        </p:nvSpPr>
+        <p:spPr>
+          <a:xfrm>
+            <a:off x="640080" y="4530852"/>
+            <a:ext cx="10911535" cy="310896"/>
+          </a:xfrm>
+          <a:prstGeom prst="rect">
+            <a:avLst/>
+          </a:prstGeom>
+          <a:noFill/>
+        </p:spPr>
+        <p:txBody>
+          <a:bodyPr wrap="square">
+            <a:spAutoFit/>
+          </a:bodyPr>
+          <a:lstStyle/>
+          <a:p>
+            <a:pPr algn="ctr"/>
+            <a:r>
+              <a:rPr sz="2000" b="0" i="1">
+                <a:solidFill>
+                  <a:srgbClr val="828282"/>
+                </a:solidFill>
+                <a:latin typeface="Arial"/>
+              </a:rPr>
+              <a:t>A única verdade imutável</a:t>
+            </a:r>
+          </a:p>
+        </p:txBody>
+      </p:sp>
+      <p:sp>
+        <p:nvSpPr>
+          <p:cNvPr id="7" name="TextBox 6"/>
+          <p:cNvSpPr txBox="1"/>
+          <p:nvPr/>
+        </p:nvSpPr>
+        <p:spPr>
+          <a:xfrm>
+            <a:off x="640080" y="4896612"/>
+            <a:ext cx="10911535" cy="310896"/>
+          </a:xfrm>
+          <a:prstGeom prst="rect">
+            <a:avLst/>
+          </a:prstGeom>
+          <a:noFill/>
+        </p:spPr>
+        <p:txBody>
+          <a:bodyPr wrap="square">
+            <a:spAutoFit/>
+          </a:bodyPr>
+          <a:lstStyle/>
+          <a:p>
+            <a:pPr algn="ctr"/>
+            <a:r>
+              <a:rPr sz="2000" b="0" i="1">
+                <a:solidFill>
+                  <a:srgbClr val="828282"/>
+                </a:solidFill>
+                <a:latin typeface="Arial"/>
+              </a:rPr>
+              <a:t>Nada se compara a ti</a:t>
+            </a:r>
+          </a:p>
+        </p:txBody>
+      </p:sp>
     </p:spTree>
   </p:cSld>
   <p:clrMapOvr>
@@ -4202,6 +4552,76 @@
           </a:p>
         </p:txBody>
       </p:sp>
+      <p:sp>
+        <p:nvSpPr>
+          <p:cNvPr id="4" name="TextBox 3"/>
+          <p:cNvSpPr txBox="1"/>
+          <p:nvPr/>
+        </p:nvSpPr>
+        <p:spPr>
+          <a:xfrm>
+            <a:off x="640080" y="4128516"/>
+            <a:ext cx="10911535" cy="310896"/>
+          </a:xfrm>
+          <a:prstGeom prst="rect">
+            <a:avLst/>
+          </a:prstGeom>
+          <a:noFill/>
+        </p:spPr>
+        <p:txBody>
+          <a:bodyPr wrap="square">
+            <a:spAutoFit/>
+          </a:bodyPr>
+          <a:lstStyle/>
+          <a:p>
+            <a:pPr algn="ctr"/>
+            <a:r>
+              <a:rPr sz="2000" b="0" i="0">
+                <a:solidFill>
+                  <a:srgbClr val="828282"/>
+                </a:solidFill>
+                <a:latin typeface="Arial"/>
+              </a:rPr>
+              <a:t>息のあるすべてのもの</a:t>
+            </a:r>
+          </a:p>
+        </p:txBody>
+      </p:sp>
+      <p:sp>
+        <p:nvSpPr>
+          <p:cNvPr id="5" name="TextBox 4"/>
+          <p:cNvSpPr txBox="1"/>
+          <p:nvPr/>
+        </p:nvSpPr>
+        <p:spPr>
+          <a:xfrm>
+            <a:off x="640080" y="4494276"/>
+            <a:ext cx="10911535" cy="310896"/>
+          </a:xfrm>
+          <a:prstGeom prst="rect">
+            <a:avLst/>
+          </a:prstGeom>
+          <a:noFill/>
+        </p:spPr>
+        <p:txBody>
+          <a:bodyPr wrap="square">
+            <a:spAutoFit/>
+          </a:bodyPr>
+          <a:lstStyle/>
+          <a:p>
+            <a:pPr algn="ctr"/>
+            <a:r>
+              <a:rPr sz="2000" b="0" i="0">
+                <a:solidFill>
+                  <a:srgbClr val="828282"/>
+                </a:solidFill>
+                <a:latin typeface="Arial"/>
+              </a:rPr>
+              <a:t>主を賛美せよ、主を賛美せよ</a:t>
+            </a:r>
+          </a:p>
+        </p:txBody>
+      </p:sp>
     </p:spTree>
   </p:cSld>
   <p:clrMapOvr>
@@ -5242,6 +5662,76 @@
           </a:p>
         </p:txBody>
       </p:sp>
+      <p:sp>
+        <p:nvSpPr>
+          <p:cNvPr id="4" name="TextBox 3"/>
+          <p:cNvSpPr txBox="1"/>
+          <p:nvPr/>
+        </p:nvSpPr>
+        <p:spPr>
+          <a:xfrm>
+            <a:off x="640080" y="4128516"/>
+            <a:ext cx="10911535" cy="310896"/>
+          </a:xfrm>
+          <a:prstGeom prst="rect">
+            <a:avLst/>
+          </a:prstGeom>
+          <a:noFill/>
+        </p:spPr>
+        <p:txBody>
+          <a:bodyPr wrap="square">
+            <a:spAutoFit/>
+          </a:bodyPr>
+          <a:lstStyle/>
+          <a:p>
+            <a:pPr algn="ctr"/>
+            <a:r>
+              <a:rPr sz="2000" b="0" i="0">
+                <a:solidFill>
+                  <a:srgbClr val="828282"/>
+                </a:solidFill>
+                <a:latin typeface="Arial"/>
+              </a:rPr>
+              <a:t>勝利しているときに賛美します</a:t>
+            </a:r>
+          </a:p>
+        </p:txBody>
+      </p:sp>
+      <p:sp>
+        <p:nvSpPr>
+          <p:cNvPr id="5" name="TextBox 4"/>
+          <p:cNvSpPr txBox="1"/>
+          <p:nvPr/>
+        </p:nvSpPr>
+        <p:spPr>
+          <a:xfrm>
+            <a:off x="640080" y="4494276"/>
+            <a:ext cx="10911535" cy="310896"/>
+          </a:xfrm>
+          <a:prstGeom prst="rect">
+            <a:avLst/>
+          </a:prstGeom>
+          <a:noFill/>
+        </p:spPr>
+        <p:txBody>
+          <a:bodyPr wrap="square">
+            <a:spAutoFit/>
+          </a:bodyPr>
+          <a:lstStyle/>
+          <a:p>
+            <a:pPr algn="ctr"/>
+            <a:r>
+              <a:rPr sz="2000" b="0" i="0">
+                <a:solidFill>
+                  <a:srgbClr val="828282"/>
+                </a:solidFill>
+                <a:latin typeface="Arial"/>
+              </a:rPr>
+              <a:t>敗北しているときに賛美します</a:t>
+            </a:r>
+          </a:p>
+        </p:txBody>
+      </p:sp>
     </p:spTree>
   </p:cSld>
   <p:clrMapOvr>
@@ -5334,6 +5824,76 @@
                 <a:latin typeface="Arial"/>
               </a:rPr>
               <a:t>E há razões demais para louvar</a:t>
+            </a:r>
+          </a:p>
+        </p:txBody>
+      </p:sp>
+      <p:sp>
+        <p:nvSpPr>
+          <p:cNvPr id="4" name="TextBox 3"/>
+          <p:cNvSpPr txBox="1"/>
+          <p:nvPr/>
+        </p:nvSpPr>
+        <p:spPr>
+          <a:xfrm>
+            <a:off x="640080" y="4128516"/>
+            <a:ext cx="10911535" cy="310896"/>
+          </a:xfrm>
+          <a:prstGeom prst="rect">
+            <a:avLst/>
+          </a:prstGeom>
+          <a:noFill/>
+        </p:spPr>
+        <p:txBody>
+          <a:bodyPr wrap="square">
+            <a:spAutoFit/>
+          </a:bodyPr>
+          <a:lstStyle/>
+          <a:p>
+            <a:pPr algn="ctr"/>
+            <a:r>
+              <a:rPr sz="2000" b="0" i="0">
+                <a:solidFill>
+                  <a:srgbClr val="828282"/>
+                </a:solidFill>
+                <a:latin typeface="Arial"/>
+              </a:rPr>
+              <a:t>あなたがあなただから賛美します</a:t>
+            </a:r>
+          </a:p>
+        </p:txBody>
+      </p:sp>
+      <p:sp>
+        <p:nvSpPr>
+          <p:cNvPr id="5" name="TextBox 4"/>
+          <p:cNvSpPr txBox="1"/>
+          <p:nvPr/>
+        </p:nvSpPr>
+        <p:spPr>
+          <a:xfrm>
+            <a:off x="640080" y="4494276"/>
+            <a:ext cx="10911535" cy="310896"/>
+          </a:xfrm>
+          <a:prstGeom prst="rect">
+            <a:avLst/>
+          </a:prstGeom>
+          <a:noFill/>
+        </p:spPr>
+        <p:txBody>
+          <a:bodyPr wrap="square">
+            <a:spAutoFit/>
+          </a:bodyPr>
+          <a:lstStyle/>
+          <a:p>
+            <a:pPr algn="ctr"/>
+            <a:r>
+              <a:rPr sz="2000" b="0" i="0">
+                <a:solidFill>
+                  <a:srgbClr val="828282"/>
+                </a:solidFill>
+                <a:latin typeface="Arial"/>
+              </a:rPr>
+              <a:t>そして賛美する理由は数え切れません</a:t>
             </a:r>
           </a:p>
         </p:txBody>
